--- a/DataAnalysis_Track/decks/DA_S03_Asking_a_database_for_rows.pptx
+++ b/DataAnalysis_Track/decks/DA_S03_Asking_a_database_for_rows.pptx
@@ -477,7 +477,7 @@
 </file>
 
 <file path=ppt/notesSlides/notesSlide1.xml><?xml version="1.0" encoding="utf-8"?>
-<p:notes xmlns:a="http://schemas.openxmlformats.org/drawingml/2006/main" xmlns:p="http://schemas.openxmlformats.org/presentationml/2006/main" xmlns:r="http://schemas.openxmlformats.org/officeDocument/2006/relationships">
+<p:notes xmlns:a="http://schemas.openxmlformats.org/drawingml/2006/main" xmlns:p="http://schemas.openxmlformats.org/presentationml/2006/main">
   <p:cSld>
     <p:spTree>
       <p:nvGrpSpPr>
@@ -521,7 +521,87 @@
           <a:lstStyle/>
           <a:p>
             <a:r>
+              <a:t>TEACHING PURPOSE</a:t>
+            </a:r>
+          </a:p>
+          <a:p>
+            <a:r>
+              <a:t>Asking a database for rows</a:t>
+            </a:r>
+          </a:p>
+          <a:p>
+            <a:r>
+              <a:t/>
+            </a:r>
+          </a:p>
+          <a:p>
+            <a:r>
+              <a:t>LECTURER CUE</a:t>
+            </a:r>
+          </a:p>
+          <a:p>
+            <a:r>
               <a:t>Start on time.</a:t>
+            </a:r>
+          </a:p>
+          <a:p>
+            <a:r>
+              <a:t/>
+            </a:r>
+          </a:p>
+          <a:p>
+            <a:r>
+              <a:t>EXPLAIN IN ORDINARY WORDS</a:t>
+            </a:r>
+          </a:p>
+          <a:p>
+            <a:r>
+              <a:t>Missing means not recorded, not automatically zero. Decide why it is missing and document the rule. Fitted fill values must come from training data when evaluating a model.</a:t>
+            </a:r>
+          </a:p>
+          <a:p>
+            <a:r>
+              <a:t/>
+            </a:r>
+          </a:p>
+          <a:p>
+            <a:r>
+              <a:t>CHECK AND EXPECTED ANSWER</a:t>
+            </a:r>
+          </a:p>
+          <a:p>
+            <a:r>
+              <a:t>Is an unrecorded energy reading evidence of zero consumption? No.</a:t>
+            </a:r>
+          </a:p>
+          <a:p>
+            <a:r>
+              <a:t/>
+            </a:r>
+          </a:p>
+          <a:p>
+            <a:r>
+              <a:t>IF LEARNERS ARE STUCK</a:t>
+            </a:r>
+          </a:p>
+          <a:p>
+            <a:r>
+              <a:t>Use three rows: a recorded zero, a recorded positive value and a blank. Explain their different meanings before cleaning.</a:t>
+            </a:r>
+          </a:p>
+          <a:p>
+            <a:r>
+              <a:t/>
+            </a:r>
+          </a:p>
+          <a:p>
+            <a:r>
+              <a:t>NEXT</a:t>
+            </a:r>
+          </a:p>
+          <a:p>
+            <a:r>
+              <a:t>Where tonight sits. Move on after a learner can explain the current example or required action.</a:t>
             </a:r>
           </a:p>
         </p:txBody>
@@ -547,7 +627,7 @@
 </file>
 
 <file path=ppt/notesSlides/notesSlide10.xml><?xml version="1.0" encoding="utf-8"?>
-<p:notes xmlns:a="http://schemas.openxmlformats.org/drawingml/2006/main" xmlns:p="http://schemas.openxmlformats.org/presentationml/2006/main" xmlns:r="http://schemas.openxmlformats.org/officeDocument/2006/relationships">
+<p:notes xmlns:a="http://schemas.openxmlformats.org/drawingml/2006/main" xmlns:p="http://schemas.openxmlformats.org/presentationml/2006/main">
   <p:cSld>
     <p:spTree>
       <p:nvGrpSpPr>
@@ -589,7 +669,91 @@
         <p:txBody>
           <a:bodyPr/>
           <a:lstStyle/>
-          <a:p/>
+          <a:p>
+            <a:r>
+              <a:t>TEACHING PURPOSE</a:t>
+            </a:r>
+          </a:p>
+          <a:p>
+            <a:r>
+              <a:t>The one that catches everybody</a:t>
+            </a:r>
+          </a:p>
+          <a:p>
+            <a:r>
+              <a:t/>
+            </a:r>
+          </a:p>
+          <a:p>
+            <a:r>
+              <a:t>CONNECT</a:t>
+            </a:r>
+          </a:p>
+          <a:p>
+            <a:r>
+              <a:t>Build on the preceding slide: Nothing, zero, and blank are three different things.</a:t>
+            </a:r>
+          </a:p>
+          <a:p>
+            <a:r>
+              <a:t/>
+            </a:r>
+          </a:p>
+          <a:p>
+            <a:r>
+              <a:t>EXPLAIN IN ORDINARY WORDS</a:t>
+            </a:r>
+          </a:p>
+          <a:p>
+            <a:r>
+              <a:t>Missing means not recorded, not automatically zero. Decide why it is missing and document the rule. Fitted fill values must come from training data when evaluating a model.</a:t>
+            </a:r>
+          </a:p>
+          <a:p>
+            <a:r>
+              <a:t/>
+            </a:r>
+          </a:p>
+          <a:p>
+            <a:r>
+              <a:t>CHECK AND EXPECTED ANSWER</a:t>
+            </a:r>
+          </a:p>
+          <a:p>
+            <a:r>
+              <a:t>Is an unrecorded energy reading evidence of zero consumption? No.</a:t>
+            </a:r>
+          </a:p>
+          <a:p>
+            <a:r>
+              <a:t/>
+            </a:r>
+          </a:p>
+          <a:p>
+            <a:r>
+              <a:t>IF LEARNERS ARE STUCK</a:t>
+            </a:r>
+          </a:p>
+          <a:p>
+            <a:r>
+              <a:t>Use three rows: a recorded zero, a recorded positive value and a blank. Explain their different meanings before cleaning.</a:t>
+            </a:r>
+          </a:p>
+          <a:p>
+            <a:r>
+              <a:t/>
+            </a:r>
+          </a:p>
+          <a:p>
+            <a:r>
+              <a:t>NEXT</a:t>
+            </a:r>
+          </a:p>
+          <a:p>
+            <a:r>
+              <a:t>Your first real answer, in four steps. Move on after a learner can explain the current example or required action.</a:t>
+            </a:r>
+          </a:p>
         </p:txBody>
       </p:sp>
       <p:sp>
@@ -612,8 +776,8 @@
 </p:notes>
 </file>
 
-<file path=ppt/notesSlides/notesSlide11.xml><?xml version="1.0" encoding="utf-8"?>
-<p:notes xmlns:a="http://schemas.openxmlformats.org/drawingml/2006/main" xmlns:p="http://schemas.openxmlformats.org/presentationml/2006/main" xmlns:r="http://schemas.openxmlformats.org/officeDocument/2006/relationships">
+<file path=ppt/notesSlides/notesSlide10006.xml><?xml version="1.0" encoding="utf-8"?>
+<p:notes xmlns:a="http://schemas.openxmlformats.org/drawingml/2006/main" xmlns:p="http://schemas.openxmlformats.org/presentationml/2006/main">
   <p:cSld>
     <p:spTree>
       <p:nvGrpSpPr>
@@ -657,7 +821,57 @@
           <a:lstStyle/>
           <a:p>
             <a:r>
-              <a:t>How much revenue did we take on delivered orders? Revenue is not a column: it is quantity times price times one minus discount, and it lives on the order lines.</a:t>
+              <a:t>TEACHING PURPOSE</a:t>
+            </a:r>
+          </a:p>
+          <a:p>
+            <a:r>
+              <a:t>A query is a written-down filter</a:t>
+            </a:r>
+          </a:p>
+          <a:p>
+            <a:r>
+              <a:t/>
+            </a:r>
+          </a:p>
+          <a:p>
+            <a:r>
+              <a:t>CONNECT</a:t>
+            </a:r>
+          </a:p>
+          <a:p>
+            <a:r>
+              <a:t>Build on the preceding slide: How do you ask a database for exactly the rows you want,.</a:t>
+            </a:r>
+          </a:p>
+          <a:p>
+            <a:r>
+              <a:t/>
+            </a:r>
+          </a:p>
+          <a:p>
+            <a:r>
+              <a:t>DELIVER THIS SLIDE</a:t>
+            </a:r>
+          </a:p>
+          <a:p>
+            <a:r>
+              <a:t>Read the stated purpose, then point to the named example or action on the slide. Ask learners to describe what they will do before moving on. For a break slide, announce the return time; for a section divider, name the next concrete task.</a:t>
+            </a:r>
+          </a:p>
+          <a:p>
+            <a:r>
+              <a:t/>
+            </a:r>
+          </a:p>
+          <a:p>
+            <a:r>
+              <a:t>NEXT</a:t>
+            </a:r>
+          </a:p>
+          <a:p>
+            <a:r>
+              <a:t>A query. Move on after a learner can explain the current example or required action.</a:t>
             </a:r>
           </a:p>
         </p:txBody>
@@ -682,8 +896,8 @@
 </p:notes>
 </file>
 
-<file path=ppt/notesSlides/notesSlide12.xml><?xml version="1.0" encoding="utf-8"?>
-<p:notes xmlns:a="http://schemas.openxmlformats.org/drawingml/2006/main" xmlns:p="http://schemas.openxmlformats.org/presentationml/2006/main" xmlns:r="http://schemas.openxmlformats.org/officeDocument/2006/relationships">
+<file path=ppt/notesSlides/notesSlide10011.xml><?xml version="1.0" encoding="utf-8"?>
+<p:notes xmlns:a="http://schemas.openxmlformats.org/drawingml/2006/main" xmlns:p="http://schemas.openxmlformats.org/presentationml/2006/main">
   <p:cSld>
     <p:spTree>
       <p:nvGrpSpPr>
@@ -727,7 +941,87 @@
           <a:lstStyle/>
           <a:p>
             <a:r>
-              <a:t>Writing = NULL instead of IS NULL. No error, no warning, zero rows, and the zero looks like a fact about the business.</a:t>
+              <a:t>TEACHING PURPOSE</a:t>
+            </a:r>
+          </a:p>
+          <a:p>
+            <a:r>
+              <a:t>Nothing, zero, and blank are three different things</a:t>
+            </a:r>
+          </a:p>
+          <a:p>
+            <a:r>
+              <a:t/>
+            </a:r>
+          </a:p>
+          <a:p>
+            <a:r>
+              <a:t>CONNECT</a:t>
+            </a:r>
+          </a:p>
+          <a:p>
+            <a:r>
+              <a:t>Build on the preceding slide: Break.</a:t>
+            </a:r>
+          </a:p>
+          <a:p>
+            <a:r>
+              <a:t/>
+            </a:r>
+          </a:p>
+          <a:p>
+            <a:r>
+              <a:t>EXPLAIN IN ORDINARY WORDS</a:t>
+            </a:r>
+          </a:p>
+          <a:p>
+            <a:r>
+              <a:t>Missing means not recorded, not automatically zero. Decide why it is missing and document the rule. Fitted fill values must come from training data when evaluating a model.</a:t>
+            </a:r>
+          </a:p>
+          <a:p>
+            <a:r>
+              <a:t/>
+            </a:r>
+          </a:p>
+          <a:p>
+            <a:r>
+              <a:t>CHECK AND EXPECTED ANSWER</a:t>
+            </a:r>
+          </a:p>
+          <a:p>
+            <a:r>
+              <a:t>Is an unrecorded energy reading evidence of zero consumption? No.</a:t>
+            </a:r>
+          </a:p>
+          <a:p>
+            <a:r>
+              <a:t/>
+            </a:r>
+          </a:p>
+          <a:p>
+            <a:r>
+              <a:t>IF LEARNERS ARE STUCK</a:t>
+            </a:r>
+          </a:p>
+          <a:p>
+            <a:r>
+              <a:t>Use three rows: a recorded zero, a recorded positive value and a blank. Explain their different meanings before cleaning.</a:t>
+            </a:r>
+          </a:p>
+          <a:p>
+            <a:r>
+              <a:t/>
+            </a:r>
+          </a:p>
+          <a:p>
+            <a:r>
+              <a:t>NEXT</a:t>
+            </a:r>
+          </a:p>
+          <a:p>
+            <a:r>
+              <a:t>The one that catches everybody. Move on after a learner can explain the current example or required action.</a:t>
             </a:r>
           </a:p>
         </p:txBody>
@@ -752,8 +1046,8 @@
 </p:notes>
 </file>
 
-<file path=ppt/notesSlides/notesSlide13.xml><?xml version="1.0" encoding="utf-8"?>
-<p:notes xmlns:a="http://schemas.openxmlformats.org/drawingml/2006/main" xmlns:p="http://schemas.openxmlformats.org/presentationml/2006/main" xmlns:r="http://schemas.openxmlformats.org/officeDocument/2006/relationships">
+<file path=ppt/notesSlides/notesSlide11.xml><?xml version="1.0" encoding="utf-8"?>
+<p:notes xmlns:a="http://schemas.openxmlformats.org/drawingml/2006/main" xmlns:p="http://schemas.openxmlformats.org/presentationml/2006/main">
   <p:cSld>
     <p:spTree>
       <p:nvGrpSpPr>
@@ -795,7 +1089,106 @@
         <p:txBody>
           <a:bodyPr/>
           <a:lstStyle/>
-          <a:p/>
+          <a:p>
+            <a:r>
+              <a:t>TEACHING PURPOSE</a:t>
+            </a:r>
+          </a:p>
+          <a:p>
+            <a:r>
+              <a:t>Your first real answer, in four steps</a:t>
+            </a:r>
+          </a:p>
+          <a:p>
+            <a:r>
+              <a:t/>
+            </a:r>
+          </a:p>
+          <a:p>
+            <a:r>
+              <a:t>CONNECT</a:t>
+            </a:r>
+          </a:p>
+          <a:p>
+            <a:r>
+              <a:t>Build on the preceding slide: The one that catches everybody.</a:t>
+            </a:r>
+          </a:p>
+          <a:p>
+            <a:r>
+              <a:t/>
+            </a:r>
+          </a:p>
+          <a:p>
+            <a:r>
+              <a:t>LECTURER CUE</a:t>
+            </a:r>
+          </a:p>
+          <a:p>
+            <a:r>
+              <a:t>How much revenue did we take on delivered orders? Revenue is not a column: it is quantity times price times one minus discount, and it lives on the order lines.</a:t>
+            </a:r>
+          </a:p>
+          <a:p>
+            <a:r>
+              <a:t/>
+            </a:r>
+          </a:p>
+          <a:p>
+            <a:r>
+              <a:t>EXPLAIN IN ORDINARY WORDS</a:t>
+            </a:r>
+          </a:p>
+          <a:p>
+            <a:r>
+              <a:t>Grain means what one row represents. A key identifies a row; a primary key may use more than one column. A join matches keys, and multiple matches can multiply rows.</a:t>
+            </a:r>
+          </a:p>
+          <a:p>
+            <a:r>
+              <a:t/>
+            </a:r>
+          </a:p>
+          <a:p>
+            <a:r>
+              <a:t>CHECK AND EXPECTED ANSWER</a:t>
+            </a:r>
+          </a:p>
+          <a:p>
+            <a:r>
+              <a:t>One order has two lines. After joining orders to lines, how many rows for it? Two. Summing a repeated order-level total would double-count.</a:t>
+            </a:r>
+          </a:p>
+          <a:p>
+            <a:r>
+              <a:t/>
+            </a:r>
+          </a:p>
+          <a:p>
+            <a:r>
+              <a:t>IF LEARNERS ARE STUCK</a:t>
+            </a:r>
+          </a:p>
+          <a:p>
+            <a:r>
+              <a:t>Write one example row from each table. Circle keys and trace each match. Aggregate to the intended grain and check counts and totals.</a:t>
+            </a:r>
+          </a:p>
+          <a:p>
+            <a:r>
+              <a:t/>
+            </a:r>
+          </a:p>
+          <a:p>
+            <a:r>
+              <a:t>NEXT</a:t>
+            </a:r>
+          </a:p>
+          <a:p>
+            <a:r>
+              <a:t>Writing = NULL instead of IS NULL. No error, no warning, zero rows, and the zero looks like a fact about the business.. Move on after a learner can explain the current example or required action.</a:t>
+            </a:r>
+          </a:p>
         </p:txBody>
       </p:sp>
       <p:sp>
@@ -818,8 +1211,8 @@
 </p:notes>
 </file>
 
-<file path=ppt/notesSlides/notesSlide14.xml><?xml version="1.0" encoding="utf-8"?>
-<p:notes xmlns:a="http://schemas.openxmlformats.org/drawingml/2006/main" xmlns:p="http://schemas.openxmlformats.org/presentationml/2006/main" xmlns:r="http://schemas.openxmlformats.org/officeDocument/2006/relationships">
+<file path=ppt/notesSlides/notesSlide12.xml><?xml version="1.0" encoding="utf-8"?>
+<p:notes xmlns:a="http://schemas.openxmlformats.org/drawingml/2006/main" xmlns:p="http://schemas.openxmlformats.org/presentationml/2006/main">
   <p:cSld>
     <p:spTree>
       <p:nvGrpSpPr>
@@ -861,7 +1254,106 @@
         <p:txBody>
           <a:bodyPr/>
           <a:lstStyle/>
-          <a:p/>
+          <a:p>
+            <a:r>
+              <a:t>TEACHING PURPOSE</a:t>
+            </a:r>
+          </a:p>
+          <a:p>
+            <a:r>
+              <a:t>Writing = NULL instead of IS NULL. No error, no warning, zero rows, and the zero looks like a fact about the business.</a:t>
+            </a:r>
+          </a:p>
+          <a:p>
+            <a:r>
+              <a:t/>
+            </a:r>
+          </a:p>
+          <a:p>
+            <a:r>
+              <a:t>CONNECT</a:t>
+            </a:r>
+          </a:p>
+          <a:p>
+            <a:r>
+              <a:t>Build on the preceding slide: Your first real answer, in four steps.</a:t>
+            </a:r>
+          </a:p>
+          <a:p>
+            <a:r>
+              <a:t/>
+            </a:r>
+          </a:p>
+          <a:p>
+            <a:r>
+              <a:t>LECTURER CUE</a:t>
+            </a:r>
+          </a:p>
+          <a:p>
+            <a:r>
+              <a:t>Writing = NULL instead of IS NULL. No error, no warning, zero rows, and the zero looks like a fact about the business.</a:t>
+            </a:r>
+          </a:p>
+          <a:p>
+            <a:r>
+              <a:t/>
+            </a:r>
+          </a:p>
+          <a:p>
+            <a:r>
+              <a:t>EXPLAIN IN ORDINARY WORDS</a:t>
+            </a:r>
+          </a:p>
+          <a:p>
+            <a:r>
+              <a:t>Missing means not recorded, not automatically zero. Decide why it is missing and document the rule. Fitted fill values must come from training data when evaluating a model.</a:t>
+            </a:r>
+          </a:p>
+          <a:p>
+            <a:r>
+              <a:t/>
+            </a:r>
+          </a:p>
+          <a:p>
+            <a:r>
+              <a:t>CHECK AND EXPECTED ANSWER</a:t>
+            </a:r>
+          </a:p>
+          <a:p>
+            <a:r>
+              <a:t>Is an unrecorded energy reading evidence of zero consumption? No.</a:t>
+            </a:r>
+          </a:p>
+          <a:p>
+            <a:r>
+              <a:t/>
+            </a:r>
+          </a:p>
+          <a:p>
+            <a:r>
+              <a:t>IF LEARNERS ARE STUCK</a:t>
+            </a:r>
+          </a:p>
+          <a:p>
+            <a:r>
+              <a:t>Use three rows: a recorded zero, a recorded positive value and a blank. Explain their different meanings before cleaning.</a:t>
+            </a:r>
+          </a:p>
+          <a:p>
+            <a:r>
+              <a:t/>
+            </a:r>
+          </a:p>
+          <a:p>
+            <a:r>
+              <a:t>NEXT</a:t>
+            </a:r>
+          </a:p>
+          <a:p>
+            <a:r>
+              <a:t>Can you answer these?. Move on after a learner can explain the current example or required action.</a:t>
+            </a:r>
+          </a:p>
         </p:txBody>
       </p:sp>
       <p:sp>
@@ -884,8 +1376,8 @@
 </p:notes>
 </file>
 
-<file path=ppt/notesSlides/notesSlide15.xml><?xml version="1.0" encoding="utf-8"?>
-<p:notes xmlns:a="http://schemas.openxmlformats.org/drawingml/2006/main" xmlns:p="http://schemas.openxmlformats.org/presentationml/2006/main" xmlns:r="http://schemas.openxmlformats.org/officeDocument/2006/relationships">
+<file path=ppt/notesSlides/notesSlide13.xml><?xml version="1.0" encoding="utf-8"?>
+<p:notes xmlns:a="http://schemas.openxmlformats.org/drawingml/2006/main" xmlns:p="http://schemas.openxmlformats.org/presentationml/2006/main">
   <p:cSld>
     <p:spTree>
       <p:nvGrpSpPr>
@@ -929,7 +1421,157 @@
           <a:lstStyle/>
           <a:p>
             <a:r>
-              <a:t>Work them in order; they get harder. Every question has its answer on the sheet, so you know within seconds whether you are right. Write the query before you look at the answer: reading it first feels like learning and is not.</a:t>
+              <a:t>TEACHING PURPOSE</a:t>
+            </a:r>
+          </a:p>
+          <a:p>
+            <a:r>
+              <a:t>Can you answer these?</a:t>
+            </a:r>
+          </a:p>
+          <a:p>
+            <a:r>
+              <a:t/>
+            </a:r>
+          </a:p>
+          <a:p>
+            <a:r>
+              <a:t>CONNECT</a:t>
+            </a:r>
+          </a:p>
+          <a:p>
+            <a:r>
+              <a:t>Build on the preceding slide: Writing = NULL instead of IS NULL. No error, no warning, zero rows, and the zero looks like a fact about the business..</a:t>
+            </a:r>
+          </a:p>
+          <a:p>
+            <a:r>
+              <a:t/>
+            </a:r>
+          </a:p>
+          <a:p>
+            <a:r>
+              <a:t>EXPLAIN IN ORDINARY WORDS</a:t>
+            </a:r>
+          </a:p>
+          <a:p>
+            <a:r>
+              <a:t>Missing means not recorded, not automatically zero. Decide why it is missing and document the rule. Fitted fill values must come from training data when evaluating a model.</a:t>
+            </a:r>
+          </a:p>
+          <a:p>
+            <a:r>
+              <a:t/>
+            </a:r>
+          </a:p>
+          <a:p>
+            <a:r>
+              <a:t>CHECK AND EXPECTED ANSWER</a:t>
+            </a:r>
+          </a:p>
+          <a:p>
+            <a:r>
+              <a:t>Is an unrecorded energy reading evidence of zero consumption? No.</a:t>
+            </a:r>
+          </a:p>
+          <a:p>
+            <a:r>
+              <a:t/>
+            </a:r>
+          </a:p>
+          <a:p>
+            <a:r>
+              <a:t>IF LEARNERS ARE STUCK</a:t>
+            </a:r>
+          </a:p>
+          <a:p>
+            <a:r>
+              <a:t>Use three rows: a recorded zero, a recorded positive value and a blank. Explain their different meanings before cleaning.</a:t>
+            </a:r>
+          </a:p>
+          <a:p>
+            <a:r>
+              <a:t/>
+            </a:r>
+          </a:p>
+          <a:p>
+            <a:r>
+              <a:t>DISCUSSION KEY FOR THIS SLIDE</a:t>
+            </a:r>
+          </a:p>
+          <a:p>
+            <a:r>
+              <a:t>ANSWERS</a:t>
+            </a:r>
+          </a:p>
+          <a:p>
+            <a:r>
+              <a:t>How did you do?</a:t>
+            </a:r>
+          </a:p>
+          <a:p>
+            <a:r>
+              <a:t>A</a:t>
+            </a:r>
+          </a:p>
+          <a:p>
+            <a:r>
+              <a:t>COUNT(*) against COUNT(city)</a:t>
+            </a:r>
+          </a:p>
+          <a:p>
+            <a:r>
+              <a:t>COUNT(*) counts rows. COUNT(city) counts rows where city is not NULL. On orders that difference is 172 rows, worth UGX 390,632,335.</a:t>
+            </a:r>
+          </a:p>
+          <a:p>
+            <a:r>
+              <a:t>B</a:t>
+            </a:r>
+          </a:p>
+          <a:p>
+            <a:r>
+              <a:t>Why = NULL matches nothing</a:t>
+            </a:r>
+          </a:p>
+          <a:p>
+            <a:r>
+              <a:t>Because NULL means no value, and comparing anything with no value is neither true nor false. The filter is never satisfied. IS NULL is a different test and it works.</a:t>
+            </a:r>
+          </a:p>
+          <a:p>
+            <a:r>
+              <a:t>C</a:t>
+            </a:r>
+          </a:p>
+          <a:p>
+            <a:r>
+              <a:t>The first question about any revenue figure</a:t>
+            </a:r>
+          </a:p>
+          <a:p>
+            <a:r>
+              <a:t>Which orders does it count? Delivered only is UGX 8,751,705,520; everything is UGX 10,758,894,480. The gap is UGX 2,007,188,960, and nobody can tell which you meant from the number alone.</a:t>
+            </a:r>
+          </a:p>
+          <a:p>
+            <a:r>
+              <a:t>Let learners attempt first; use this to explain the reasoning, not just reveal the answer.</a:t>
+            </a:r>
+          </a:p>
+          <a:p>
+            <a:r>
+              <a:t/>
+            </a:r>
+          </a:p>
+          <a:p>
+            <a:r>
+              <a:t>NEXT</a:t>
+            </a:r>
+          </a:p>
+          <a:p>
+            <a:r>
+              <a:t>How did you do?. Move on after a learner can explain the current example or required action.</a:t>
             </a:r>
           </a:p>
         </p:txBody>
@@ -954,8 +1596,8 @@
 </p:notes>
 </file>
 
-<file path=ppt/notesSlides/notesSlide16.xml><?xml version="1.0" encoding="utf-8"?>
-<p:notes xmlns:a="http://schemas.openxmlformats.org/drawingml/2006/main" xmlns:p="http://schemas.openxmlformats.org/presentationml/2006/main" xmlns:r="http://schemas.openxmlformats.org/officeDocument/2006/relationships">
+<file path=ppt/notesSlides/notesSlide14.xml><?xml version="1.0" encoding="utf-8"?>
+<p:notes xmlns:a="http://schemas.openxmlformats.org/drawingml/2006/main" xmlns:p="http://schemas.openxmlformats.org/presentationml/2006/main">
   <p:cSld>
     <p:spTree>
       <p:nvGrpSpPr>
@@ -997,7 +1639,91 @@
         <p:txBody>
           <a:bodyPr/>
           <a:lstStyle/>
-          <a:p/>
+          <a:p>
+            <a:r>
+              <a:t>TEACHING PURPOSE</a:t>
+            </a:r>
+          </a:p>
+          <a:p>
+            <a:r>
+              <a:t>How did you do?</a:t>
+            </a:r>
+          </a:p>
+          <a:p>
+            <a:r>
+              <a:t/>
+            </a:r>
+          </a:p>
+          <a:p>
+            <a:r>
+              <a:t>CONNECT</a:t>
+            </a:r>
+          </a:p>
+          <a:p>
+            <a:r>
+              <a:t>Build on the preceding slide: Can you answer these?.</a:t>
+            </a:r>
+          </a:p>
+          <a:p>
+            <a:r>
+              <a:t/>
+            </a:r>
+          </a:p>
+          <a:p>
+            <a:r>
+              <a:t>EXPLAIN IN ORDINARY WORDS</a:t>
+            </a:r>
+          </a:p>
+          <a:p>
+            <a:r>
+              <a:t>Missing means not recorded, not automatically zero. Decide why it is missing and document the rule. Fitted fill values must come from training data when evaluating a model.</a:t>
+            </a:r>
+          </a:p>
+          <a:p>
+            <a:r>
+              <a:t/>
+            </a:r>
+          </a:p>
+          <a:p>
+            <a:r>
+              <a:t>CHECK AND EXPECTED ANSWER</a:t>
+            </a:r>
+          </a:p>
+          <a:p>
+            <a:r>
+              <a:t>Is an unrecorded energy reading evidence of zero consumption? No.</a:t>
+            </a:r>
+          </a:p>
+          <a:p>
+            <a:r>
+              <a:t/>
+            </a:r>
+          </a:p>
+          <a:p>
+            <a:r>
+              <a:t>IF LEARNERS ARE STUCK</a:t>
+            </a:r>
+          </a:p>
+          <a:p>
+            <a:r>
+              <a:t>Use three rows: a recorded zero, a recorded positive value and a blank. Explain their different meanings before cleaning.</a:t>
+            </a:r>
+          </a:p>
+          <a:p>
+            <a:r>
+              <a:t/>
+            </a:r>
+          </a:p>
+          <a:p>
+            <a:r>
+              <a:t>NEXT</a:t>
+            </a:r>
+          </a:p>
+          <a:p>
+            <a:r>
+              <a:t>Eight questions against the database. Move on after a learner can explain the current example or required action.</a:t>
+            </a:r>
+          </a:p>
         </p:txBody>
       </p:sp>
       <p:sp>
@@ -1020,8 +1746,8 @@
 </p:notes>
 </file>
 
-<file path=ppt/notesSlides/notesSlide17.xml><?xml version="1.0" encoding="utf-8"?>
-<p:notes xmlns:a="http://schemas.openxmlformats.org/drawingml/2006/main" xmlns:p="http://schemas.openxmlformats.org/presentationml/2006/main" xmlns:r="http://schemas.openxmlformats.org/officeDocument/2006/relationships">
+<file path=ppt/notesSlides/notesSlide15.xml><?xml version="1.0" encoding="utf-8"?>
+<p:notes xmlns:a="http://schemas.openxmlformats.org/drawingml/2006/main" xmlns:p="http://schemas.openxmlformats.org/presentationml/2006/main">
   <p:cSld>
     <p:spTree>
       <p:nvGrpSpPr>
@@ -1065,7 +1791,102 @@
           <a:lstStyle/>
           <a:p>
             <a:r>
-              <a:t>Five more questions on the sheet. Then: name one table at work you would like to query, and write down what its columns probably are.</a:t>
+              <a:t>TEACHING PURPOSE</a:t>
+            </a:r>
+          </a:p>
+          <a:p>
+            <a:r>
+              <a:t>Eight questions against the database</a:t>
+            </a:r>
+          </a:p>
+          <a:p>
+            <a:r>
+              <a:t/>
+            </a:r>
+          </a:p>
+          <a:p>
+            <a:r>
+              <a:t>CONNECT</a:t>
+            </a:r>
+          </a:p>
+          <a:p>
+            <a:r>
+              <a:t>Build on the preceding slide: How did you do?.</a:t>
+            </a:r>
+          </a:p>
+          <a:p>
+            <a:r>
+              <a:t/>
+            </a:r>
+          </a:p>
+          <a:p>
+            <a:r>
+              <a:t>LECTURER CUE</a:t>
+            </a:r>
+          </a:p>
+          <a:p>
+            <a:r>
+              <a:t>Work them in order; they get harder. Every question has its answer on the sheet, so you know within seconds whether you are right. Write the query before you look at the answer: reading it first feels like learning and is not.</a:t>
+            </a:r>
+          </a:p>
+          <a:p>
+            <a:r>
+              <a:t/>
+            </a:r>
+          </a:p>
+          <a:p>
+            <a:r>
+              <a:t>EXPLAIN IN ORDINARY WORDS</a:t>
+            </a:r>
+          </a:p>
+          <a:p>
+            <a:r>
+              <a:t>An observation describes the data. A finding answers a defined question with evidence. A recommendation adds an action, its justification and limits.</a:t>
+            </a:r>
+          </a:p>
+          <a:p>
+            <a:r>
+              <a:t/>
+            </a:r>
+          </a:p>
+          <a:p>
+            <a:r>
+              <a:t>CHECK AND EXPECTED ANSWER</a:t>
+            </a:r>
+          </a:p>
+          <a:p>
+            <a:r>
+              <a:t>Does a difference between two groups prove one caused the other? No. Other differences or selection may explain it.</a:t>
+            </a:r>
+          </a:p>
+          <a:p>
+            <a:r>
+              <a:t/>
+            </a:r>
+          </a:p>
+          <a:p>
+            <a:r>
+              <a:t>IF LEARNERS ARE STUCK</a:t>
+            </a:r>
+          </a:p>
+          <a:p>
+            <a:r>
+              <a:t>Ask for the population, time period, number and comparison. Then ask what additional evidence could change the recommendation.</a:t>
+            </a:r>
+          </a:p>
+          <a:p>
+            <a:r>
+              <a:t/>
+            </a:r>
+          </a:p>
+          <a:p>
+            <a:r>
+              <a:t>NEXT</a:t>
+            </a:r>
+          </a:p>
+          <a:p>
+            <a:r>
+              <a:t>What you can do now. Move on after a learner can explain the current example or required action.</a:t>
             </a:r>
           </a:p>
         </p:txBody>
@@ -1090,8 +1911,8 @@
 </p:notes>
 </file>
 
-<file path=ppt/notesSlides/notesSlide18.xml><?xml version="1.0" encoding="utf-8"?>
-<p:notes xmlns:a="http://schemas.openxmlformats.org/drawingml/2006/main" xmlns:p="http://schemas.openxmlformats.org/presentationml/2006/main" xmlns:r="http://schemas.openxmlformats.org/officeDocument/2006/relationships">
+<file path=ppt/notesSlides/notesSlide16.xml><?xml version="1.0" encoding="utf-8"?>
+<p:notes xmlns:a="http://schemas.openxmlformats.org/drawingml/2006/main" xmlns:p="http://schemas.openxmlformats.org/presentationml/2006/main">
   <p:cSld>
     <p:spTree>
       <p:nvGrpSpPr>
@@ -1135,7 +1956,87 @@
           <a:lstStyle/>
           <a:p>
             <a:r>
-              <a:t>It is the cheapest habit in this course and it catches most wrong answers before they leave your screen. A number that moved when you did not expect it to is telling you something you need to know.</a:t>
+              <a:t>TEACHING PURPOSE</a:t>
+            </a:r>
+          </a:p>
+          <a:p>
+            <a:r>
+              <a:t>What you can do now</a:t>
+            </a:r>
+          </a:p>
+          <a:p>
+            <a:r>
+              <a:t/>
+            </a:r>
+          </a:p>
+          <a:p>
+            <a:r>
+              <a:t>CONNECT</a:t>
+            </a:r>
+          </a:p>
+          <a:p>
+            <a:r>
+              <a:t>Build on the preceding slide: Eight questions against the database.</a:t>
+            </a:r>
+          </a:p>
+          <a:p>
+            <a:r>
+              <a:t/>
+            </a:r>
+          </a:p>
+          <a:p>
+            <a:r>
+              <a:t>EXPLAIN IN ORDINARY WORDS</a:t>
+            </a:r>
+          </a:p>
+          <a:p>
+            <a:r>
+              <a:t>Missing means not recorded, not automatically zero. Decide why it is missing and document the rule. Fitted fill values must come from training data when evaluating a model.</a:t>
+            </a:r>
+          </a:p>
+          <a:p>
+            <a:r>
+              <a:t/>
+            </a:r>
+          </a:p>
+          <a:p>
+            <a:r>
+              <a:t>CHECK AND EXPECTED ANSWER</a:t>
+            </a:r>
+          </a:p>
+          <a:p>
+            <a:r>
+              <a:t>Is an unrecorded energy reading evidence of zero consumption? No.</a:t>
+            </a:r>
+          </a:p>
+          <a:p>
+            <a:r>
+              <a:t/>
+            </a:r>
+          </a:p>
+          <a:p>
+            <a:r>
+              <a:t>IF LEARNERS ARE STUCK</a:t>
+            </a:r>
+          </a:p>
+          <a:p>
+            <a:r>
+              <a:t>Use three rows: a recorded zero, a recorded positive value and a blank. Explain their different meanings before cleaning.</a:t>
+            </a:r>
+          </a:p>
+          <a:p>
+            <a:r>
+              <a:t/>
+            </a:r>
+          </a:p>
+          <a:p>
+            <a:r>
+              <a:t>NEXT</a:t>
+            </a:r>
+          </a:p>
+          <a:p>
+            <a:r>
+              <a:t>Before the next session. Move on after a learner can explain the current example or required action.</a:t>
             </a:r>
           </a:p>
         </p:txBody>
@@ -1160,8 +2061,8 @@
 </p:notes>
 </file>
 
-<file path=ppt/notesSlides/notesSlide2.xml><?xml version="1.0" encoding="utf-8"?>
-<p:notes xmlns:a="http://schemas.openxmlformats.org/drawingml/2006/main" xmlns:p="http://schemas.openxmlformats.org/presentationml/2006/main" xmlns:r="http://schemas.openxmlformats.org/officeDocument/2006/relationships">
+<file path=ppt/notesSlides/notesSlide17.xml><?xml version="1.0" encoding="utf-8"?>
+<p:notes xmlns:a="http://schemas.openxmlformats.org/drawingml/2006/main" xmlns:p="http://schemas.openxmlformats.org/presentationml/2006/main">
   <p:cSld>
     <p:spTree>
       <p:nvGrpSpPr>
@@ -1205,7 +2106,102 @@
           <a:lstStyle/>
           <a:p>
             <a:r>
-              <a:t>Tonight is session 3 of twelve.</a:t>
+              <a:t>TEACHING PURPOSE</a:t>
+            </a:r>
+          </a:p>
+          <a:p>
+            <a:r>
+              <a:t>Before the next session</a:t>
+            </a:r>
+          </a:p>
+          <a:p>
+            <a:r>
+              <a:t/>
+            </a:r>
+          </a:p>
+          <a:p>
+            <a:r>
+              <a:t>CONNECT</a:t>
+            </a:r>
+          </a:p>
+          <a:p>
+            <a:r>
+              <a:t>Build on the preceding slide: What you can do now.</a:t>
+            </a:r>
+          </a:p>
+          <a:p>
+            <a:r>
+              <a:t/>
+            </a:r>
+          </a:p>
+          <a:p>
+            <a:r>
+              <a:t>LECTURER CUE</a:t>
+            </a:r>
+          </a:p>
+          <a:p>
+            <a:r>
+              <a:t>Five more questions on the sheet. Then: name one table at work you would like to query, and write down what its columns probably are.</a:t>
+            </a:r>
+          </a:p>
+          <a:p>
+            <a:r>
+              <a:t/>
+            </a:r>
+          </a:p>
+          <a:p>
+            <a:r>
+              <a:t>EXPLAIN IN ORDINARY WORDS</a:t>
+            </a:r>
+          </a:p>
+          <a:p>
+            <a:r>
+              <a:t>An observation describes the data. A finding answers a defined question with evidence. A recommendation adds an action, its justification and limits.</a:t>
+            </a:r>
+          </a:p>
+          <a:p>
+            <a:r>
+              <a:t/>
+            </a:r>
+          </a:p>
+          <a:p>
+            <a:r>
+              <a:t>CHECK AND EXPECTED ANSWER</a:t>
+            </a:r>
+          </a:p>
+          <a:p>
+            <a:r>
+              <a:t>Does a difference between two groups prove one caused the other? No. Other differences or selection may explain it.</a:t>
+            </a:r>
+          </a:p>
+          <a:p>
+            <a:r>
+              <a:t/>
+            </a:r>
+          </a:p>
+          <a:p>
+            <a:r>
+              <a:t>IF LEARNERS ARE STUCK</a:t>
+            </a:r>
+          </a:p>
+          <a:p>
+            <a:r>
+              <a:t>Ask for the population, time period, number and comparison. Then ask what additional evidence could change the recommendation.</a:t>
+            </a:r>
+          </a:p>
+          <a:p>
+            <a:r>
+              <a:t/>
+            </a:r>
+          </a:p>
+          <a:p>
+            <a:r>
+              <a:t>NEXT</a:t>
+            </a:r>
+          </a:p>
+          <a:p>
+            <a:r>
+              <a:t>Check the row count after every clause. Move on after a learner can explain the current example or required action.</a:t>
             </a:r>
           </a:p>
         </p:txBody>
@@ -1230,8 +2226,8 @@
 </p:notes>
 </file>
 
-<file path=ppt/notesSlides/notesSlide3.xml><?xml version="1.0" encoding="utf-8"?>
-<p:notes xmlns:a="http://schemas.openxmlformats.org/drawingml/2006/main" xmlns:p="http://schemas.openxmlformats.org/presentationml/2006/main" xmlns:r="http://schemas.openxmlformats.org/officeDocument/2006/relationships">
+<file path=ppt/notesSlides/notesSlide18.xml><?xml version="1.0" encoding="utf-8"?>
+<p:notes xmlns:a="http://schemas.openxmlformats.org/drawingml/2006/main" xmlns:p="http://schemas.openxmlformats.org/presentationml/2006/main">
   <p:cSld>
     <p:spTree>
       <p:nvGrpSpPr>
@@ -1273,7 +2269,46 @@
         <p:txBody>
           <a:bodyPr/>
           <a:lstStyle/>
-          <a:p/>
+          <a:p>
+            <a:r>
+              <a:t>TEACHING PURPOSE</a:t>
+            </a:r>
+          </a:p>
+          <a:p>
+            <a:r>
+              <a:t>Check the row count after every clause</a:t>
+            </a:r>
+          </a:p>
+          <a:p>
+            <a:r>
+              <a:t/>
+            </a:r>
+          </a:p>
+          <a:p>
+            <a:r>
+              <a:t>CONNECT</a:t>
+            </a:r>
+          </a:p>
+          <a:p>
+            <a:r>
+              <a:t>Build on the preceding slide: Before the next session.</a:t>
+            </a:r>
+          </a:p>
+          <a:p>
+            <a:r>
+              <a:t/>
+            </a:r>
+          </a:p>
+          <a:p>
+            <a:r>
+              <a:t>LECTURER CUE</a:t>
+            </a:r>
+          </a:p>
+          <a:p>
+            <a:r>
+              <a:t>It is the cheapest habit in this course and it catches most wrong answers before they leave your screen. A number that moved when you did not expect it to is telling you something you need to know.</a:t>
+            </a:r>
+          </a:p>
         </p:txBody>
       </p:sp>
       <p:sp>
@@ -1296,8 +2331,8 @@
 </p:notes>
 </file>
 
-<file path=ppt/notesSlides/notesSlide4.xml><?xml version="1.0" encoding="utf-8"?>
-<p:notes xmlns:a="http://schemas.openxmlformats.org/drawingml/2006/main" xmlns:p="http://schemas.openxmlformats.org/presentationml/2006/main" xmlns:r="http://schemas.openxmlformats.org/officeDocument/2006/relationships">
+<file path=ppt/notesSlides/notesSlide2.xml><?xml version="1.0" encoding="utf-8"?>
+<p:notes xmlns:a="http://schemas.openxmlformats.org/drawingml/2006/main" xmlns:p="http://schemas.openxmlformats.org/presentationml/2006/main">
   <p:cSld>
     <p:spTree>
       <p:nvGrpSpPr>
@@ -1341,7 +2376,102 @@
           <a:lstStyle/>
           <a:p>
             <a:r>
-              <a:t>These three are what tonight is marked against, in the sense that the lab checks them.</a:t>
+              <a:t>TEACHING PURPOSE</a:t>
+            </a:r>
+          </a:p>
+          <a:p>
+            <a:r>
+              <a:t>Where tonight sits</a:t>
+            </a:r>
+          </a:p>
+          <a:p>
+            <a:r>
+              <a:t/>
+            </a:r>
+          </a:p>
+          <a:p>
+            <a:r>
+              <a:t>CONNECT</a:t>
+            </a:r>
+          </a:p>
+          <a:p>
+            <a:r>
+              <a:t>Build on the preceding slide: Asking a database for rows.</a:t>
+            </a:r>
+          </a:p>
+          <a:p>
+            <a:r>
+              <a:t/>
+            </a:r>
+          </a:p>
+          <a:p>
+            <a:r>
+              <a:t>LECTURER CUE</a:t>
+            </a:r>
+          </a:p>
+          <a:p>
+            <a:r>
+              <a:t>Tonight is session 3 of fifteen.</a:t>
+            </a:r>
+          </a:p>
+          <a:p>
+            <a:r>
+              <a:t/>
+            </a:r>
+          </a:p>
+          <a:p>
+            <a:r>
+              <a:t>EXPLAIN IN ORDINARY WORDS</a:t>
+            </a:r>
+          </a:p>
+          <a:p>
+            <a:r>
+              <a:t>Grain means what one row represents. A key identifies a row; a primary key may use more than one column. A join matches keys, and multiple matches can multiply rows.</a:t>
+            </a:r>
+          </a:p>
+          <a:p>
+            <a:r>
+              <a:t/>
+            </a:r>
+          </a:p>
+          <a:p>
+            <a:r>
+              <a:t>CHECK AND EXPECTED ANSWER</a:t>
+            </a:r>
+          </a:p>
+          <a:p>
+            <a:r>
+              <a:t>One order has two lines. After joining orders to lines, how many rows for it? Two. Summing a repeated order-level total would double-count.</a:t>
+            </a:r>
+          </a:p>
+          <a:p>
+            <a:r>
+              <a:t/>
+            </a:r>
+          </a:p>
+          <a:p>
+            <a:r>
+              <a:t>IF LEARNERS ARE STUCK</a:t>
+            </a:r>
+          </a:p>
+          <a:p>
+            <a:r>
+              <a:t>Write one example row from each table. Circle keys and trace each match. Aggregate to the intended grain and check counts and totals.</a:t>
+            </a:r>
+          </a:p>
+          <a:p>
+            <a:r>
+              <a:t/>
+            </a:r>
+          </a:p>
+          <a:p>
+            <a:r>
+              <a:t>NEXT</a:t>
+            </a:r>
+          </a:p>
+          <a:p>
+            <a:r>
+              <a:t>The words for tonight. Move on after a learner can explain the current example or required action.</a:t>
             </a:r>
           </a:p>
         </p:txBody>
@@ -1366,8 +2496,8 @@
 </p:notes>
 </file>
 
-<file path=ppt/notesSlides/notesSlide5.xml><?xml version="1.0" encoding="utf-8"?>
-<p:notes xmlns:a="http://schemas.openxmlformats.org/drawingml/2006/main" xmlns:p="http://schemas.openxmlformats.org/presentationml/2006/main" xmlns:r="http://schemas.openxmlformats.org/officeDocument/2006/relationships">
+<file path=ppt/notesSlides/notesSlide3.xml><?xml version="1.0" encoding="utf-8"?>
+<p:notes xmlns:a="http://schemas.openxmlformats.org/drawingml/2006/main" xmlns:p="http://schemas.openxmlformats.org/presentationml/2006/main">
   <p:cSld>
     <p:spTree>
       <p:nvGrpSpPr>
@@ -1411,7 +2541,87 @@
           <a:lstStyle/>
           <a:p>
             <a:r>
-              <a:t>Every clause you add changes the row count. The row count is how you check yourself.</a:t>
+              <a:t>TEACHING PURPOSE</a:t>
+            </a:r>
+          </a:p>
+          <a:p>
+            <a:r>
+              <a:t>The words for tonight</a:t>
+            </a:r>
+          </a:p>
+          <a:p>
+            <a:r>
+              <a:t/>
+            </a:r>
+          </a:p>
+          <a:p>
+            <a:r>
+              <a:t>CONNECT</a:t>
+            </a:r>
+          </a:p>
+          <a:p>
+            <a:r>
+              <a:t>Build on the preceding slide: Where tonight sits.</a:t>
+            </a:r>
+          </a:p>
+          <a:p>
+            <a:r>
+              <a:t/>
+            </a:r>
+          </a:p>
+          <a:p>
+            <a:r>
+              <a:t>EXPLAIN IN ORDINARY WORDS</a:t>
+            </a:r>
+          </a:p>
+          <a:p>
+            <a:r>
+              <a:t>Missing means not recorded, not automatically zero. Decide why it is missing and document the rule. Fitted fill values must come from training data when evaluating a model.</a:t>
+            </a:r>
+          </a:p>
+          <a:p>
+            <a:r>
+              <a:t/>
+            </a:r>
+          </a:p>
+          <a:p>
+            <a:r>
+              <a:t>CHECK AND EXPECTED ANSWER</a:t>
+            </a:r>
+          </a:p>
+          <a:p>
+            <a:r>
+              <a:t>Is an unrecorded energy reading evidence of zero consumption? No.</a:t>
+            </a:r>
+          </a:p>
+          <a:p>
+            <a:r>
+              <a:t/>
+            </a:r>
+          </a:p>
+          <a:p>
+            <a:r>
+              <a:t>IF LEARNERS ARE STUCK</a:t>
+            </a:r>
+          </a:p>
+          <a:p>
+            <a:r>
+              <a:t>Use three rows: a recorded zero, a recorded positive value and a blank. Explain their different meanings before cleaning.</a:t>
+            </a:r>
+          </a:p>
+          <a:p>
+            <a:r>
+              <a:t/>
+            </a:r>
+          </a:p>
+          <a:p>
+            <a:r>
+              <a:t>NEXT</a:t>
+            </a:r>
+          </a:p>
+          <a:p>
+            <a:r>
+              <a:t>By the end of tonight you can…. Move on after a learner can explain the current example or required action.</a:t>
             </a:r>
           </a:p>
         </p:txBody>
@@ -1436,8 +2646,8 @@
 </p:notes>
 </file>
 
-<file path=ppt/notesSlides/notesSlide6.xml><?xml version="1.0" encoding="utf-8"?>
-<p:notes xmlns:a="http://schemas.openxmlformats.org/drawingml/2006/main" xmlns:p="http://schemas.openxmlformats.org/presentationml/2006/main" xmlns:r="http://schemas.openxmlformats.org/officeDocument/2006/relationships">
+<file path=ppt/notesSlides/notesSlide4.xml><?xml version="1.0" encoding="utf-8"?>
+<p:notes xmlns:a="http://schemas.openxmlformats.org/drawingml/2006/main" xmlns:p="http://schemas.openxmlformats.org/presentationml/2006/main">
   <p:cSld>
     <p:spTree>
       <p:nvGrpSpPr>
@@ -1481,7 +2691,102 @@
           <a:lstStyle/>
           <a:p>
             <a:r>
-              <a:t>A written description of the rows you want. You describe the result and the database works out how to fetch it, which is why SQL has outlived every tool built on top of it.</a:t>
+              <a:t>TEACHING PURPOSE</a:t>
+            </a:r>
+          </a:p>
+          <a:p>
+            <a:r>
+              <a:t>By the end of tonight you can…</a:t>
+            </a:r>
+          </a:p>
+          <a:p>
+            <a:r>
+              <a:t/>
+            </a:r>
+          </a:p>
+          <a:p>
+            <a:r>
+              <a:t>CONNECT</a:t>
+            </a:r>
+          </a:p>
+          <a:p>
+            <a:r>
+              <a:t>Build on the preceding slide: The words for tonight.</a:t>
+            </a:r>
+          </a:p>
+          <a:p>
+            <a:r>
+              <a:t/>
+            </a:r>
+          </a:p>
+          <a:p>
+            <a:r>
+              <a:t>LECTURER CUE</a:t>
+            </a:r>
+          </a:p>
+          <a:p>
+            <a:r>
+              <a:t>These three are what tonight is marked against, in the sense that the lab checks them.</a:t>
+            </a:r>
+          </a:p>
+          <a:p>
+            <a:r>
+              <a:t/>
+            </a:r>
+          </a:p>
+          <a:p>
+            <a:r>
+              <a:t>EXPLAIN IN ORDINARY WORDS</a:t>
+            </a:r>
+          </a:p>
+          <a:p>
+            <a:r>
+              <a:t>Missing means not recorded, not automatically zero. Decide why it is missing and document the rule. Fitted fill values must come from training data when evaluating a model.</a:t>
+            </a:r>
+          </a:p>
+          <a:p>
+            <a:r>
+              <a:t/>
+            </a:r>
+          </a:p>
+          <a:p>
+            <a:r>
+              <a:t>CHECK AND EXPECTED ANSWER</a:t>
+            </a:r>
+          </a:p>
+          <a:p>
+            <a:r>
+              <a:t>Is an unrecorded energy reading evidence of zero consumption? No.</a:t>
+            </a:r>
+          </a:p>
+          <a:p>
+            <a:r>
+              <a:t/>
+            </a:r>
+          </a:p>
+          <a:p>
+            <a:r>
+              <a:t>IF LEARNERS ARE STUCK</a:t>
+            </a:r>
+          </a:p>
+          <a:p>
+            <a:r>
+              <a:t>Use three rows: a recorded zero, a recorded positive value and a blank. Explain their different meanings before cleaning.</a:t>
+            </a:r>
+          </a:p>
+          <a:p>
+            <a:r>
+              <a:t/>
+            </a:r>
+          </a:p>
+          <a:p>
+            <a:r>
+              <a:t>NEXT</a:t>
+            </a:r>
+          </a:p>
+          <a:p>
+            <a:r>
+              <a:t>How do you ask a database for exactly the rows you want,. Move on after a learner can explain the current example or required action.</a:t>
             </a:r>
           </a:p>
         </p:txBody>
@@ -1506,8 +2811,8 @@
 </p:notes>
 </file>
 
-<file path=ppt/notesSlides/notesSlide7.xml><?xml version="1.0" encoding="utf-8"?>
-<p:notes xmlns:a="http://schemas.openxmlformats.org/drawingml/2006/main" xmlns:p="http://schemas.openxmlformats.org/presentationml/2006/main" xmlns:r="http://schemas.openxmlformats.org/officeDocument/2006/relationships">
+<file path=ppt/notesSlides/notesSlide5.xml><?xml version="1.0" encoding="utf-8"?>
+<p:notes xmlns:a="http://schemas.openxmlformats.org/drawingml/2006/main" xmlns:p="http://schemas.openxmlformats.org/presentationml/2006/main">
   <p:cSld>
     <p:spTree>
       <p:nvGrpSpPr>
@@ -1551,7 +2856,102 @@
           <a:lstStyle/>
           <a:p>
             <a:r>
-              <a:t>No value recorded. It is not zero and it is not an empty piece of text. Any comparison with NULL is neither true nor false, so a filter written with = NULL matches nothing at all.</a:t>
+              <a:t>TEACHING PURPOSE</a:t>
+            </a:r>
+          </a:p>
+          <a:p>
+            <a:r>
+              <a:t>How do you ask a database for exactly the rows you want,</a:t>
+            </a:r>
+          </a:p>
+          <a:p>
+            <a:r>
+              <a:t/>
+            </a:r>
+          </a:p>
+          <a:p>
+            <a:r>
+              <a:t>CONNECT</a:t>
+            </a:r>
+          </a:p>
+          <a:p>
+            <a:r>
+              <a:t>Build on the preceding slide: By the end of tonight you can….</a:t>
+            </a:r>
+          </a:p>
+          <a:p>
+            <a:r>
+              <a:t/>
+            </a:r>
+          </a:p>
+          <a:p>
+            <a:r>
+              <a:t>LECTURER CUE</a:t>
+            </a:r>
+          </a:p>
+          <a:p>
+            <a:r>
+              <a:t>Every clause you add changes the row count. The row count is how you check yourself.</a:t>
+            </a:r>
+          </a:p>
+          <a:p>
+            <a:r>
+              <a:t/>
+            </a:r>
+          </a:p>
+          <a:p>
+            <a:r>
+              <a:t>EXPLAIN IN ORDINARY WORDS</a:t>
+            </a:r>
+          </a:p>
+          <a:p>
+            <a:r>
+              <a:t>An observation describes the data. A finding answers a defined question with evidence. A recommendation adds an action, its justification and limits.</a:t>
+            </a:r>
+          </a:p>
+          <a:p>
+            <a:r>
+              <a:t/>
+            </a:r>
+          </a:p>
+          <a:p>
+            <a:r>
+              <a:t>CHECK AND EXPECTED ANSWER</a:t>
+            </a:r>
+          </a:p>
+          <a:p>
+            <a:r>
+              <a:t>Does a difference between two groups prove one caused the other? No. Other differences or selection may explain it.</a:t>
+            </a:r>
+          </a:p>
+          <a:p>
+            <a:r>
+              <a:t/>
+            </a:r>
+          </a:p>
+          <a:p>
+            <a:r>
+              <a:t>IF LEARNERS ARE STUCK</a:t>
+            </a:r>
+          </a:p>
+          <a:p>
+            <a:r>
+              <a:t>Ask for the population, time period, number and comparison. Then ask what additional evidence could change the recommendation.</a:t>
+            </a:r>
+          </a:p>
+          <a:p>
+            <a:r>
+              <a:t/>
+            </a:r>
+          </a:p>
+          <a:p>
+            <a:r>
+              <a:t>NEXT</a:t>
+            </a:r>
+          </a:p>
+          <a:p>
+            <a:r>
+              <a:t>A query is a written-down filter. Move on after a learner can explain the current example or required action.</a:t>
             </a:r>
           </a:p>
         </p:txBody>
@@ -1576,8 +2976,8 @@
 </p:notes>
 </file>
 
-<file path=ppt/notesSlides/notesSlide8.xml><?xml version="1.0" encoding="utf-8"?>
-<p:notes xmlns:a="http://schemas.openxmlformats.org/drawingml/2006/main" xmlns:p="http://schemas.openxmlformats.org/presentationml/2006/main" xmlns:r="http://schemas.openxmlformats.org/officeDocument/2006/relationships">
+<file path=ppt/notesSlides/notesSlide6.xml><?xml version="1.0" encoding="utf-8"?>
+<p:notes xmlns:a="http://schemas.openxmlformats.org/drawingml/2006/main" xmlns:p="http://schemas.openxmlformats.org/presentationml/2006/main">
   <p:cSld>
     <p:spTree>
       <p:nvGrpSpPr>
@@ -1619,7 +3019,61 @@
         <p:txBody>
           <a:bodyPr/>
           <a:lstStyle/>
-          <a:p/>
+          <a:p>
+            <a:r>
+              <a:t>TEACHING PURPOSE</a:t>
+            </a:r>
+          </a:p>
+          <a:p>
+            <a:r>
+              <a:t>A query</a:t>
+            </a:r>
+          </a:p>
+          <a:p>
+            <a:r>
+              <a:t/>
+            </a:r>
+          </a:p>
+          <a:p>
+            <a:r>
+              <a:t>CONNECT</a:t>
+            </a:r>
+          </a:p>
+          <a:p>
+            <a:r>
+              <a:t>Build on the preceding slide: A query is a written-down filter.</a:t>
+            </a:r>
+          </a:p>
+          <a:p>
+            <a:r>
+              <a:t/>
+            </a:r>
+          </a:p>
+          <a:p>
+            <a:r>
+              <a:t>LECTURER CUE</a:t>
+            </a:r>
+          </a:p>
+          <a:p>
+            <a:r>
+              <a:t>A written description of the rows you want. You describe the result and the database works out how to fetch it, which is why SQL has outlived every tool built on top of it.</a:t>
+            </a:r>
+          </a:p>
+          <a:p>
+            <a:r>
+              <a:t/>
+            </a:r>
+          </a:p>
+          <a:p>
+            <a:r>
+              <a:t>NEXT</a:t>
+            </a:r>
+          </a:p>
+          <a:p>
+            <a:r>
+              <a:t>NULL. Move on after a learner can explain the current example or required action.</a:t>
+            </a:r>
+          </a:p>
         </p:txBody>
       </p:sp>
       <p:sp>
@@ -1642,8 +3096,8 @@
 </p:notes>
 </file>
 
-<file path=ppt/notesSlides/notesSlide9.xml><?xml version="1.0" encoding="utf-8"?>
-<p:notes xmlns:a="http://schemas.openxmlformats.org/drawingml/2006/main" xmlns:p="http://schemas.openxmlformats.org/presentationml/2006/main" xmlns:r="http://schemas.openxmlformats.org/officeDocument/2006/relationships">
+<file path=ppt/notesSlides/notesSlide7.xml><?xml version="1.0" encoding="utf-8"?>
+<p:notes xmlns:a="http://schemas.openxmlformats.org/drawingml/2006/main" xmlns:p="http://schemas.openxmlformats.org/presentationml/2006/main">
   <p:cSld>
     <p:spTree>
       <p:nvGrpSpPr>
@@ -1687,7 +3141,372 @@
           <a:lstStyle/>
           <a:p>
             <a:r>
+              <a:t>TEACHING PURPOSE</a:t>
+            </a:r>
+          </a:p>
+          <a:p>
+            <a:r>
+              <a:t>NULL</a:t>
+            </a:r>
+          </a:p>
+          <a:p>
+            <a:r>
+              <a:t/>
+            </a:r>
+          </a:p>
+          <a:p>
+            <a:r>
+              <a:t>CONNECT</a:t>
+            </a:r>
+          </a:p>
+          <a:p>
+            <a:r>
+              <a:t>Build on the preceding slide: A query.</a:t>
+            </a:r>
+          </a:p>
+          <a:p>
+            <a:r>
+              <a:t/>
+            </a:r>
+          </a:p>
+          <a:p>
+            <a:r>
+              <a:t>LECTURER CUE</a:t>
+            </a:r>
+          </a:p>
+          <a:p>
+            <a:r>
+              <a:t>No value recorded. It is not zero and it is not an empty piece of text. Any comparison with NULL is neither true nor false, so a filter written with = NULL matches nothing at all.</a:t>
+            </a:r>
+          </a:p>
+          <a:p>
+            <a:r>
+              <a:t/>
+            </a:r>
+          </a:p>
+          <a:p>
+            <a:r>
+              <a:t>EXPLAIN IN ORDINARY WORDS</a:t>
+            </a:r>
+          </a:p>
+          <a:p>
+            <a:r>
+              <a:t>Missing means not recorded, not automatically zero. Decide why it is missing and document the rule. Fitted fill values must come from training data when evaluating a model.</a:t>
+            </a:r>
+          </a:p>
+          <a:p>
+            <a:r>
+              <a:t/>
+            </a:r>
+          </a:p>
+          <a:p>
+            <a:r>
+              <a:t>CHECK AND EXPECTED ANSWER</a:t>
+            </a:r>
+          </a:p>
+          <a:p>
+            <a:r>
+              <a:t>Is an unrecorded energy reading evidence of zero consumption? No.</a:t>
+            </a:r>
+          </a:p>
+          <a:p>
+            <a:r>
+              <a:t/>
+            </a:r>
+          </a:p>
+          <a:p>
+            <a:r>
+              <a:t>IF LEARNERS ARE STUCK</a:t>
+            </a:r>
+          </a:p>
+          <a:p>
+            <a:r>
+              <a:t>Use three rows: a recorded zero, a recorded positive value and a blank. Explain their different meanings before cleaning.</a:t>
+            </a:r>
+          </a:p>
+          <a:p>
+            <a:r>
+              <a:t/>
+            </a:r>
+          </a:p>
+          <a:p>
+            <a:r>
+              <a:t>NEXT</a:t>
+            </a:r>
+          </a:p>
+          <a:p>
+            <a:r>
+              <a:t>Build it one clause at a time, watching the row count. Move on after a learner can explain the current example or required action.</a:t>
+            </a:r>
+          </a:p>
+        </p:txBody>
+      </p:sp>
+      <p:sp>
+        <p:nvSpPr>
+          <p:cNvPr id="4" name="Slide Number Placeholder 3"/>
+          <p:cNvSpPr>
+            <a:spLocks noGrp="1"/>
+          </p:cNvSpPr>
+          <p:nvPr>
+            <p:ph type="sldNum" idx="5" sz="quarter"/>
+          </p:nvPr>
+        </p:nvSpPr>
+        <p:spPr/>
+      </p:sp>
+    </p:spTree>
+  </p:cSld>
+  <p:clrMapOvr>
+    <a:masterClrMapping/>
+  </p:clrMapOvr>
+</p:notes>
+</file>
+
+<file path=ppt/notesSlides/notesSlide8.xml><?xml version="1.0" encoding="utf-8"?>
+<p:notes xmlns:a="http://schemas.openxmlformats.org/drawingml/2006/main" xmlns:p="http://schemas.openxmlformats.org/presentationml/2006/main">
+  <p:cSld>
+    <p:spTree>
+      <p:nvGrpSpPr>
+        <p:cNvPr id="1" name=""/>
+        <p:cNvGrpSpPr/>
+        <p:nvPr/>
+      </p:nvGrpSpPr>
+      <p:grpSpPr>
+        <a:xfrm>
+          <a:off x="0" y="0"/>
+          <a:ext cx="0" cy="0"/>
+          <a:chOff x="0" y="0"/>
+          <a:chExt cx="0" cy="0"/>
+        </a:xfrm>
+      </p:grpSpPr>
+      <p:sp>
+        <p:nvSpPr>
+          <p:cNvPr id="2" name="Slide Image Placeholder 1"/>
+          <p:cNvSpPr>
+            <a:spLocks noGrp="1"/>
+          </p:cNvSpPr>
+          <p:nvPr>
+            <p:ph type="sldImg" idx="2"/>
+          </p:nvPr>
+        </p:nvSpPr>
+        <p:spPr/>
+      </p:sp>
+      <p:sp>
+        <p:nvSpPr>
+          <p:cNvPr id="3" name="Notes Placeholder 2"/>
+          <p:cNvSpPr>
+            <a:spLocks noGrp="1"/>
+          </p:cNvSpPr>
+          <p:nvPr>
+            <p:ph type="body" idx="3" sz="quarter"/>
+          </p:nvPr>
+        </p:nvSpPr>
+        <p:spPr/>
+        <p:txBody>
+          <a:bodyPr/>
+          <a:lstStyle/>
+          <a:p>
+            <a:r>
+              <a:t>TEACHING PURPOSE</a:t>
+            </a:r>
+          </a:p>
+          <a:p>
+            <a:r>
+              <a:t>Build it one clause at a time, watching the row count</a:t>
+            </a:r>
+          </a:p>
+          <a:p>
+            <a:r>
+              <a:t/>
+            </a:r>
+          </a:p>
+          <a:p>
+            <a:r>
+              <a:t>CONNECT</a:t>
+            </a:r>
+          </a:p>
+          <a:p>
+            <a:r>
+              <a:t>Build on the preceding slide: NULL.</a:t>
+            </a:r>
+          </a:p>
+          <a:p>
+            <a:r>
+              <a:t/>
+            </a:r>
+          </a:p>
+          <a:p>
+            <a:r>
+              <a:t>EXPLAIN IN ORDINARY WORDS</a:t>
+            </a:r>
+          </a:p>
+          <a:p>
+            <a:r>
+              <a:t>A condition is a True/False question. Python executes the matching indented branch. = assigns; == compares. &gt;= includes the boundary, while &gt; excludes it.</a:t>
+            </a:r>
+          </a:p>
+          <a:p>
+            <a:r>
+              <a:t/>
+            </a:r>
+          </a:p>
+          <a:p>
+            <a:r>
+              <a:t>CHECK AND EXPECTED ANSWER</a:t>
+            </a:r>
+          </a:p>
+          <a:p>
+            <a:r>
+              <a:t>With value 30, is value &gt;= 30 true? Yes. Is value &gt; 30 true? No.</a:t>
+            </a:r>
+          </a:p>
+          <a:p>
+            <a:r>
+              <a:t/>
+            </a:r>
+          </a:p>
+          <a:p>
+            <a:r>
+              <a:t>IF LEARNERS ARE STUCK</a:t>
+            </a:r>
+          </a:p>
+          <a:p>
+            <a:r>
+              <a:t>Try one value below, at and above the boundary before running the code.</a:t>
+            </a:r>
+          </a:p>
+          <a:p>
+            <a:r>
+              <a:t/>
+            </a:r>
+          </a:p>
+          <a:p>
+            <a:r>
+              <a:t>NEXT</a:t>
+            </a:r>
+          </a:p>
+          <a:p>
+            <a:r>
+              <a:t>Break. Move on after a learner can explain the current example or required action.</a:t>
+            </a:r>
+          </a:p>
+        </p:txBody>
+      </p:sp>
+      <p:sp>
+        <p:nvSpPr>
+          <p:cNvPr id="4" name="Slide Number Placeholder 3"/>
+          <p:cNvSpPr>
+            <a:spLocks noGrp="1"/>
+          </p:cNvSpPr>
+          <p:nvPr>
+            <p:ph type="sldNum" idx="5" sz="quarter"/>
+          </p:nvPr>
+        </p:nvSpPr>
+        <p:spPr/>
+      </p:sp>
+    </p:spTree>
+  </p:cSld>
+  <p:clrMapOvr>
+    <a:masterClrMapping/>
+  </p:clrMapOvr>
+</p:notes>
+</file>
+
+<file path=ppt/notesSlides/notesSlide9.xml><?xml version="1.0" encoding="utf-8"?>
+<p:notes xmlns:a="http://schemas.openxmlformats.org/drawingml/2006/main" xmlns:p="http://schemas.openxmlformats.org/presentationml/2006/main">
+  <p:cSld>
+    <p:spTree>
+      <p:nvGrpSpPr>
+        <p:cNvPr id="1" name=""/>
+        <p:cNvGrpSpPr/>
+        <p:nvPr/>
+      </p:nvGrpSpPr>
+      <p:grpSpPr>
+        <a:xfrm>
+          <a:off x="0" y="0"/>
+          <a:ext cx="0" cy="0"/>
+          <a:chOff x="0" y="0"/>
+          <a:chExt cx="0" cy="0"/>
+        </a:xfrm>
+      </p:grpSpPr>
+      <p:sp>
+        <p:nvSpPr>
+          <p:cNvPr id="2" name="Slide Image Placeholder 1"/>
+          <p:cNvSpPr>
+            <a:spLocks noGrp="1"/>
+          </p:cNvSpPr>
+          <p:nvPr>
+            <p:ph type="sldImg" idx="2"/>
+          </p:nvPr>
+        </p:nvSpPr>
+        <p:spPr/>
+      </p:sp>
+      <p:sp>
+        <p:nvSpPr>
+          <p:cNvPr id="3" name="Notes Placeholder 2"/>
+          <p:cNvSpPr>
+            <a:spLocks noGrp="1"/>
+          </p:cNvSpPr>
+          <p:nvPr>
+            <p:ph type="body" idx="3" sz="quarter"/>
+          </p:nvPr>
+        </p:nvSpPr>
+        <p:spPr/>
+        <p:txBody>
+          <a:bodyPr/>
+          <a:lstStyle/>
+          <a:p>
+            <a:r>
+              <a:t>TEACHING PURPOSE</a:t>
+            </a:r>
+          </a:p>
+          <a:p>
+            <a:r>
+              <a:t>Break</a:t>
+            </a:r>
+          </a:p>
+          <a:p>
+            <a:r>
+              <a:t/>
+            </a:r>
+          </a:p>
+          <a:p>
+            <a:r>
+              <a:t>CONNECT</a:t>
+            </a:r>
+          </a:p>
+          <a:p>
+            <a:r>
+              <a:t>Build on the preceding slide: Build it one clause at a time, watching the row count.</a:t>
+            </a:r>
+          </a:p>
+          <a:p>
+            <a:r>
+              <a:t/>
+            </a:r>
+          </a:p>
+          <a:p>
+            <a:r>
+              <a:t>LECTURER CUE</a:t>
+            </a:r>
+          </a:p>
+          <a:p>
+            <a:r>
               <a:t>Ten minutes.</a:t>
+            </a:r>
+          </a:p>
+          <a:p>
+            <a:r>
+              <a:t/>
+            </a:r>
+          </a:p>
+          <a:p>
+            <a:r>
+              <a:t>NEXT</a:t>
+            </a:r>
+          </a:p>
+          <a:p>
+            <a:r>
+              <a:t>Nothing, zero, and blank are three different things. Move on after a learner can explain the current example or required action.</a:t>
             </a:r>
           </a:p>
         </p:txBody>
@@ -5308,7 +7127,7 @@
                 </a:solidFill>
                 <a:latin typeface="Calibri"/>
               </a:rPr>
-              <a:t>NULL, and why it needs its own half hour. A missing value is not zero, so any comparison with it comes back neither true nor false, and a filter written with = NULL returns nothing at all with no error. Then COUNT(*) aga</a:t>
+              <a:t>NULL, and why it needs its own half hour.</a:t>
             </a:r>
           </a:p>
         </p:txBody>
@@ -6695,7 +8514,7 @@
         <p:spPr>
           <a:xfrm>
             <a:off x="685800" y="1600200"/>
-            <a:ext cx="10820095" cy="1100371"/>
+            <a:ext cx="10820095" cy="1603291"/>
           </a:xfrm>
           <a:prstGeom prst="rect">
             <a:avLst/>
@@ -6736,7 +8555,7 @@
         </p:nvSpPr>
         <p:spPr>
           <a:xfrm>
-            <a:off x="685800" y="2792011"/>
+            <a:off x="685800" y="3477811"/>
             <a:ext cx="10820095" cy="457200"/>
           </a:xfrm>
           <a:prstGeom prst="rect">
@@ -7838,7 +9657,7 @@
         <p:spPr>
           <a:xfrm>
             <a:off x="685800" y="1911095"/>
-            <a:ext cx="10820095" cy="1243584"/>
+            <a:ext cx="10820095" cy="1617199"/>
           </a:xfrm>
           <a:prstGeom prst="roundRect">
             <a:avLst>
@@ -7883,7 +9702,7 @@
         <p:spPr>
           <a:xfrm>
             <a:off x="978408" y="2112264"/>
-            <a:ext cx="10234879" cy="877823"/>
+            <a:ext cx="10234879" cy="1251439"/>
           </a:xfrm>
           <a:prstGeom prst="rect">
             <a:avLst/>
@@ -7924,7 +9743,7 @@
         </p:nvSpPr>
         <p:spPr>
           <a:xfrm>
-            <a:off x="685800" y="3465575"/>
+            <a:off x="685800" y="3802615"/>
             <a:ext cx="10820095" cy="310896"/>
           </a:xfrm>
           <a:prstGeom prst="rect">
@@ -7950,7 +9769,7 @@
                 </a:solidFill>
                 <a:latin typeface="Calibri"/>
               </a:rPr>
-              <a:t>Work these questions in order:</a:t>
+              <a:t>Work these questions in order</a:t>
             </a:r>
           </a:p>
         </p:txBody>
@@ -7963,8 +9782,8 @@
         </p:nvSpPr>
         <p:spPr>
           <a:xfrm>
-            <a:off x="685800" y="3886200"/>
-            <a:ext cx="5227167" cy="365760"/>
+            <a:off x="685800" y="4278103"/>
+            <a:ext cx="5227167" cy="385501"/>
           </a:xfrm>
           <a:prstGeom prst="rect">
             <a:avLst/>
@@ -7992,7 +9811,7 @@
                 </a:solidFill>
                 <a:latin typeface="Calibri"/>
               </a:rPr>
-              <a:t>→  How many orders, and how many were delivered?</a:t>
+              <a:t>How many orders, and how many were delivered?</a:t>
             </a:r>
           </a:p>
         </p:txBody>
@@ -8005,8 +9824,8 @@
         </p:nvSpPr>
         <p:spPr>
           <a:xfrm>
-            <a:off x="685800" y="4306824"/>
-            <a:ext cx="5227167" cy="365760"/>
+            <a:off x="685800" y="4755045"/>
+            <a:ext cx="5227167" cy="385501"/>
           </a:xfrm>
           <a:prstGeom prst="rect">
             <a:avLst/>
@@ -8034,7 +9853,7 @@
                 </a:solidFill>
                 <a:latin typeface="Calibri"/>
               </a:rPr>
-              <a:t>→  Which sales channel is used most?</a:t>
+              <a:t>Which sales channel is used most?</a:t>
             </a:r>
           </a:p>
         </p:txBody>
@@ -8047,8 +9866,8 @@
         </p:nvSpPr>
         <p:spPr>
           <a:xfrm>
-            <a:off x="685800" y="4727448"/>
-            <a:ext cx="5227167" cy="365760"/>
+            <a:off x="685800" y="5231987"/>
+            <a:ext cx="5227167" cy="385501"/>
           </a:xfrm>
           <a:prstGeom prst="rect">
             <a:avLst/>
@@ -8076,7 +9895,7 @@
                 </a:solidFill>
                 <a:latin typeface="Calibri"/>
               </a:rPr>
-              <a:t>→  Which customer segments have more than 80 customers?</a:t>
+              <a:t>Which customer segments have more than 80 customers?</a:t>
             </a:r>
           </a:p>
         </p:txBody>
@@ -8089,8 +9908,8 @@
         </p:nvSpPr>
         <p:spPr>
           <a:xfrm>
-            <a:off x="6278727" y="3886200"/>
-            <a:ext cx="5227167" cy="365760"/>
+            <a:off x="6278727" y="4278103"/>
+            <a:ext cx="5227167" cy="385501"/>
           </a:xfrm>
           <a:prstGeom prst="rect">
             <a:avLst/>
@@ -8118,7 +9937,7 @@
                 </a:solidFill>
                 <a:latin typeface="Calibri"/>
               </a:rPr>
-              <a:t>→  Total revenue, before any filtering.</a:t>
+              <a:t>Total revenue, before any filtering.</a:t>
             </a:r>
           </a:p>
         </p:txBody>
@@ -8131,8 +9950,8 @@
         </p:nvSpPr>
         <p:spPr>
           <a:xfrm>
-            <a:off x="6278727" y="4306824"/>
-            <a:ext cx="5227167" cy="365760"/>
+            <a:off x="6278727" y="4755045"/>
+            <a:ext cx="5227167" cy="385501"/>
           </a:xfrm>
           <a:prstGeom prst="rect">
             <a:avLst/>
@@ -8160,7 +9979,7 @@
                 </a:solidFill>
                 <a:latin typeface="Calibri"/>
               </a:rPr>
-              <a:t>→  Revenue on delivered orders only.</a:t>
+              <a:t>Revenue on delivered orders only.</a:t>
             </a:r>
           </a:p>
         </p:txBody>
@@ -8173,8 +9992,8 @@
         </p:nvSpPr>
         <p:spPr>
           <a:xfrm>
-            <a:off x="6278727" y="4727448"/>
-            <a:ext cx="5227167" cy="365760"/>
+            <a:off x="6278727" y="5231987"/>
+            <a:ext cx="5227167" cy="697851"/>
           </a:xfrm>
           <a:prstGeom prst="rect">
             <a:avLst/>
@@ -8202,7 +10021,7 @@
                 </a:solidFill>
                 <a:latin typeface="Calibri"/>
               </a:rPr>
-              <a:t>→  How many orders have no customer, and what are they worth?</a:t>
+              <a:t>How many orders have no customer, and what are they worth?</a:t>
             </a:r>
           </a:p>
         </p:txBody>
@@ -13151,7 +14970,7 @@
                 </a:solidFill>
                 <a:latin typeface="Calibri"/>
               </a:rPr>
-              <a:t>A table is rows and columns, and a query is a description of the rows you want. SELECT, FROM, WHERE, ORDER BY, LIMIT, typed live against the orders table, checking the row count after every clause. Each one is shown besi</a:t>
+              <a:t>A table is rows and columns, and a query is a description of the rows you want.</a:t>
             </a:r>
           </a:p>
         </p:txBody>
